--- a/assets/pptx/catalog-357.pptx
+++ b/assets/pptx/catalog-357.pptx
@@ -3249,7 +3249,7 @@
                 <a:ea typeface="Ebrima"/>
                 <a:cs typeface="Ebrima"/>
               </a:rPr>
-              <a:t>በፀሎት በፀሎት በፀሎት (2x)</a:t>
+              <a:t>በፀሎት በፀሎት በፀሎት 2x</a:t>
             </a:r>
           </a:p>
         </p:txBody>
@@ -3612,7 +3612,7 @@
                 <a:ea typeface="Ebrima"/>
                 <a:cs typeface="Ebrima"/>
               </a:rPr>
-              <a:t>በይ ፀሎቴ (2x)</a:t>
+              <a:t>በይ ፀሎቴ 2x</a:t>
             </a:r>
           </a:p>
           <a:p>
@@ -3823,7 +3823,7 @@
                 <a:ea typeface="Ebrima"/>
                 <a:cs typeface="Ebrima"/>
               </a:rPr>
-              <a:t>(በፀሎት)</a:t>
+              <a:t>በፀሎት</a:t>
             </a:r>
           </a:p>
           <a:p>
@@ -3877,7 +3877,7 @@
                 <a:ea typeface="Ebrima"/>
                 <a:cs typeface="Ebrima"/>
               </a:rPr>
-              <a:t>በፀሎት በመንበርከክ (2x)</a:t>
+              <a:t>በፀሎት በመንበርከክ 2x</a:t>
             </a:r>
           </a:p>
         </p:txBody>
@@ -4222,7 +4222,7 @@
                 <a:ea typeface="Ebrima"/>
                 <a:cs typeface="Ebrima"/>
               </a:rPr>
-              <a:t>በይ ፀሎቴ (2x)</a:t>
+              <a:t>በይ ፀሎቴ 2x</a:t>
             </a:r>
           </a:p>
           <a:p>
@@ -4433,7 +4433,7 @@
                 <a:ea typeface="Ebrima"/>
                 <a:cs typeface="Ebrima"/>
               </a:rPr>
-              <a:t>(በፀሎት)</a:t>
+              <a:t>በፀሎት</a:t>
             </a:r>
           </a:p>
           <a:p>
@@ -4487,7 +4487,7 @@
                 <a:ea typeface="Ebrima"/>
                 <a:cs typeface="Ebrima"/>
               </a:rPr>
-              <a:t>በፀሎት በመንበርከክ (2x)</a:t>
+              <a:t>በፀሎት በመንበርከክ 2x</a:t>
             </a:r>
           </a:p>
         </p:txBody>
